--- a/docs/pptx/carbo/ritu-carbo-egfr-ratio-hist.pptx
+++ b/docs/pptx/carbo/ritu-carbo-egfr-ratio-hist.pptx
@@ -2271,7 +2271,7 @@
           </p:nvSpPr>
           <p:spPr>
             <a:xfrm>
-              <a:off x="994649" y="5023734"/>
+              <a:off x="994649" y="5025967"/>
               <a:ext cx="7603582" cy="0"/>
             </a:xfrm>
             <a:custGeom>
@@ -2314,7 +2314,7 @@
           </p:nvSpPr>
           <p:spPr>
             <a:xfrm>
-              <a:off x="994649" y="4175101"/>
+              <a:off x="994649" y="4181801"/>
               <a:ext cx="7603582" cy="0"/>
             </a:xfrm>
             <a:custGeom>
@@ -2357,7 +2357,7 @@
           </p:nvSpPr>
           <p:spPr>
             <a:xfrm>
-              <a:off x="994649" y="3326468"/>
+              <a:off x="994649" y="3337635"/>
               <a:ext cx="7603582" cy="0"/>
             </a:xfrm>
             <a:custGeom>
@@ -2400,7 +2400,7 @@
           </p:nvSpPr>
           <p:spPr>
             <a:xfrm>
-              <a:off x="994649" y="2477836"/>
+              <a:off x="994649" y="2493468"/>
               <a:ext cx="7603582" cy="0"/>
             </a:xfrm>
             <a:custGeom>
@@ -2787,7 +2787,7 @@
           </p:nvSpPr>
           <p:spPr>
             <a:xfrm>
-              <a:off x="994649" y="4599418"/>
+              <a:off x="994649" y="4603884"/>
               <a:ext cx="7603582" cy="0"/>
             </a:xfrm>
             <a:custGeom>
@@ -2830,7 +2830,7 @@
           </p:nvSpPr>
           <p:spPr>
             <a:xfrm>
-              <a:off x="994649" y="3750785"/>
+              <a:off x="994649" y="3759718"/>
               <a:ext cx="7603582" cy="0"/>
             </a:xfrm>
             <a:custGeom>
@@ -2873,7 +2873,7 @@
           </p:nvSpPr>
           <p:spPr>
             <a:xfrm>
-              <a:off x="994649" y="2902152"/>
+              <a:off x="994649" y="2915551"/>
               <a:ext cx="7603582" cy="0"/>
             </a:xfrm>
             <a:custGeom>
@@ -2916,7 +2916,7 @@
           </p:nvSpPr>
           <p:spPr>
             <a:xfrm>
-              <a:off x="994649" y="2053519"/>
+              <a:off x="994649" y="2071385"/>
               <a:ext cx="7603582" cy="0"/>
             </a:xfrm>
             <a:custGeom>
@@ -3287,8 +3287,8 @@
           </p:nvSpPr>
           <p:spPr>
             <a:xfrm>
-              <a:off x="2492324" y="3929444"/>
-              <a:ext cx="576029" cy="1518606"/>
+              <a:off x="2492324" y="4018774"/>
+              <a:ext cx="576029" cy="1429276"/>
             </a:xfrm>
             <a:prstGeom prst="rect">
               <a:avLst/>
@@ -4146,7 +4146,7 @@
           </p:nvSpPr>
           <p:spPr>
             <a:xfrm>
-              <a:off x="835933" y="4548440"/>
+              <a:off x="835933" y="4552906"/>
               <a:ext cx="79004" cy="101955"/>
             </a:xfrm>
             <a:prstGeom prst="rect">
@@ -4192,7 +4192,7 @@
           </p:nvSpPr>
           <p:spPr>
             <a:xfrm>
-              <a:off x="756929" y="3699807"/>
+              <a:off x="756929" y="3708740"/>
               <a:ext cx="158008" cy="101955"/>
             </a:xfrm>
             <a:prstGeom prst="rect">
@@ -4238,7 +4238,7 @@
           </p:nvSpPr>
           <p:spPr>
             <a:xfrm>
-              <a:off x="756929" y="2851174"/>
+              <a:off x="756929" y="2864574"/>
               <a:ext cx="158008" cy="101955"/>
             </a:xfrm>
             <a:prstGeom prst="rect">
@@ -4284,7 +4284,7 @@
           </p:nvSpPr>
           <p:spPr>
             <a:xfrm>
-              <a:off x="756929" y="2002541"/>
+              <a:off x="756929" y="2020407"/>
               <a:ext cx="158008" cy="101955"/>
             </a:xfrm>
             <a:prstGeom prst="rect">
